--- a/Reporte 180926.pptx
+++ b/Reporte 180926.pptx
@@ -6427,7 +6427,7 @@
                   <a:srgbClr val="D8AB72"/>
                 </a:solidFill>
               </a:rPr>
-              <a:t>17</a:t>
+              <a:t>18</a:t>
             </a:r>
             <a:r>
               <a:rPr kumimoji="0" lang="es-MX" sz="1600" b="0" i="0" u="none" strike="noStrike" kern="0" cap="none" spc="0" normalizeH="0" baseline="0" noProof="0" dirty="0">
@@ -6574,10 +6574,10 @@
       </p:sp>
       <p:pic>
         <p:nvPicPr>
-          <p:cNvPr id="4" name="Imagen 3">
+          <p:cNvPr id="5" name="Imagen 4">
             <a:extLst>
               <a:ext uri="{FF2B5EF4-FFF2-40B4-BE49-F238E27FC236}">
-                <a16:creationId xmlns:a16="http://schemas.microsoft.com/office/drawing/2014/main" id="{07574F9F-0B75-DE98-0F3C-A4CED35962FE}"/>
+                <a16:creationId xmlns:a16="http://schemas.microsoft.com/office/drawing/2014/main" id="{88534F0E-5454-64A9-20DB-4C196A27C37F}"/>
               </a:ext>
             </a:extLst>
           </p:cNvPr>
@@ -6594,8 +6594,8 @@
         </p:blipFill>
         <p:spPr>
           <a:xfrm>
-            <a:off x="0" y="730099"/>
-            <a:ext cx="9144000" cy="3826177"/>
+            <a:off x="0" y="726888"/>
+            <a:ext cx="9144000" cy="3832600"/>
           </a:xfrm>
           <a:prstGeom prst="rect">
             <a:avLst/>
@@ -6680,10 +6680,10 @@
       </p:sp>
       <p:pic>
         <p:nvPicPr>
-          <p:cNvPr id="3" name="Imagen 2">
+          <p:cNvPr id="4" name="Imagen 3">
             <a:extLst>
               <a:ext uri="{FF2B5EF4-FFF2-40B4-BE49-F238E27FC236}">
-                <a16:creationId xmlns:a16="http://schemas.microsoft.com/office/drawing/2014/main" id="{74AD98C6-6CC5-57C5-C7A7-09FC9CD1E431}"/>
+                <a16:creationId xmlns:a16="http://schemas.microsoft.com/office/drawing/2014/main" id="{60337745-77D5-BB5D-C96E-337A176E09EB}"/>
               </a:ext>
             </a:extLst>
           </p:cNvPr>
@@ -6700,8 +6700,8 @@
         </p:blipFill>
         <p:spPr>
           <a:xfrm>
-            <a:off x="0" y="1177803"/>
-            <a:ext cx="9144000" cy="2930769"/>
+            <a:off x="0" y="1194208"/>
+            <a:ext cx="9144000" cy="2897960"/>
           </a:xfrm>
           <a:prstGeom prst="rect">
             <a:avLst/>
@@ -6786,10 +6786,10 @@
       </p:sp>
       <p:pic>
         <p:nvPicPr>
-          <p:cNvPr id="5" name="Imagen 4">
+          <p:cNvPr id="4" name="Imagen 3">
             <a:extLst>
               <a:ext uri="{FF2B5EF4-FFF2-40B4-BE49-F238E27FC236}">
-                <a16:creationId xmlns:a16="http://schemas.microsoft.com/office/drawing/2014/main" id="{26681D79-09B4-E9CD-EE6E-D6A208DCB979}"/>
+                <a16:creationId xmlns:a16="http://schemas.microsoft.com/office/drawing/2014/main" id="{621D92DE-5F89-78E8-8797-F62C130DCCB7}"/>
               </a:ext>
             </a:extLst>
           </p:cNvPr>
@@ -6806,8 +6806,8 @@
         </p:blipFill>
         <p:spPr>
           <a:xfrm>
-            <a:off x="0" y="591347"/>
-            <a:ext cx="9144000" cy="4103682"/>
+            <a:off x="0" y="467477"/>
+            <a:ext cx="9144000" cy="4351421"/>
           </a:xfrm>
           <a:prstGeom prst="rect">
             <a:avLst/>
@@ -6892,10 +6892,10 @@
       </p:sp>
       <p:pic>
         <p:nvPicPr>
-          <p:cNvPr id="3" name="Imagen 2">
+          <p:cNvPr id="4" name="Imagen 3">
             <a:extLst>
               <a:ext uri="{FF2B5EF4-FFF2-40B4-BE49-F238E27FC236}">
-                <a16:creationId xmlns:a16="http://schemas.microsoft.com/office/drawing/2014/main" id="{929D8BE8-2BE6-7B45-F7D2-A486E1134E25}"/>
+                <a16:creationId xmlns:a16="http://schemas.microsoft.com/office/drawing/2014/main" id="{25FDE4C4-2047-644B-5AEA-8BF8EEDE0E48}"/>
               </a:ext>
             </a:extLst>
           </p:cNvPr>
@@ -6912,8 +6912,8 @@
         </p:blipFill>
         <p:spPr>
           <a:xfrm>
-            <a:off x="0" y="1193342"/>
-            <a:ext cx="9144000" cy="2899691"/>
+            <a:off x="0" y="1185671"/>
+            <a:ext cx="9144000" cy="2915034"/>
           </a:xfrm>
           <a:prstGeom prst="rect">
             <a:avLst/>
@@ -6998,10 +6998,10 @@
       </p:sp>
       <p:pic>
         <p:nvPicPr>
-          <p:cNvPr id="3" name="Imagen 2">
+          <p:cNvPr id="4" name="Imagen 3">
             <a:extLst>
               <a:ext uri="{FF2B5EF4-FFF2-40B4-BE49-F238E27FC236}">
-                <a16:creationId xmlns:a16="http://schemas.microsoft.com/office/drawing/2014/main" id="{E632E27A-EE83-7EFB-AC8C-3E74432702A8}"/>
+                <a16:creationId xmlns:a16="http://schemas.microsoft.com/office/drawing/2014/main" id="{6BE9C89C-F34E-37E0-775B-92D7D925031E}"/>
               </a:ext>
             </a:extLst>
           </p:cNvPr>
@@ -7018,8 +7018,8 @@
         </p:blipFill>
         <p:spPr>
           <a:xfrm>
-            <a:off x="0" y="1585183"/>
-            <a:ext cx="9144000" cy="2116009"/>
+            <a:off x="0" y="576646"/>
+            <a:ext cx="9144000" cy="4393407"/>
           </a:xfrm>
           <a:prstGeom prst="rect">
             <a:avLst/>
@@ -7108,44 +7108,36 @@
           </a:p>
         </p:txBody>
       </p:sp>
-      <p:sp>
-        <p:nvSpPr>
-          <p:cNvPr id="2" name="CuadroTexto 1">
+      <p:pic>
+        <p:nvPicPr>
+          <p:cNvPr id="4" name="Imagen 3">
             <a:extLst>
               <a:ext uri="{FF2B5EF4-FFF2-40B4-BE49-F238E27FC236}">
-                <a16:creationId xmlns:a16="http://schemas.microsoft.com/office/drawing/2014/main" id="{0B566944-67F3-B2A9-13BA-A9D527E8CD3A}"/>
+                <a16:creationId xmlns:a16="http://schemas.microsoft.com/office/drawing/2014/main" id="{B597B1E1-4525-4458-3E47-D2B0FA499867}"/>
               </a:ext>
             </a:extLst>
           </p:cNvPr>
-          <p:cNvSpPr txBox="1"/>
+          <p:cNvPicPr>
+            <a:picLocks noChangeAspect="1"/>
+          </p:cNvPicPr>
           <p:nvPr/>
-        </p:nvSpPr>
+        </p:nvPicPr>
+        <p:blipFill>
+          <a:blip r:embed="rId2"/>
+          <a:stretch>
+            <a:fillRect/>
+          </a:stretch>
+        </p:blipFill>
         <p:spPr>
           <a:xfrm>
-            <a:off x="316800" y="2166134"/>
-            <a:ext cx="8236800" cy="954107"/>
+            <a:off x="0" y="846101"/>
+            <a:ext cx="9144000" cy="3594174"/>
           </a:xfrm>
           <a:prstGeom prst="rect">
             <a:avLst/>
           </a:prstGeom>
-          <a:noFill/>
         </p:spPr>
-        <p:txBody>
-          <a:bodyPr wrap="square" rtlCol="0">
-            <a:spAutoFit/>
-          </a:bodyPr>
-          <a:lstStyle/>
-          <a:p>
-            <a:pPr algn="ctr"/>
-            <a:r>
-              <a:rPr lang="es-MX" sz="2800" b="1" dirty="0">
-                <a:latin typeface="Montserrat" panose="00000500000000000000" pitchFamily="2" charset="0"/>
-              </a:rPr>
-              <a:t>Hoy no se registraron llamadas de radioescuchas</a:t>
-            </a:r>
-          </a:p>
-        </p:txBody>
-      </p:sp>
+      </p:pic>
     </p:spTree>
     <p:extLst>
       <p:ext uri="{BB962C8B-B14F-4D97-AF65-F5344CB8AC3E}">
@@ -7292,10 +7284,10 @@
       </p:sp>
       <p:pic>
         <p:nvPicPr>
-          <p:cNvPr id="3" name="Imagen 2">
+          <p:cNvPr id="4" name="Imagen 3">
             <a:extLst>
               <a:ext uri="{FF2B5EF4-FFF2-40B4-BE49-F238E27FC236}">
-                <a16:creationId xmlns:a16="http://schemas.microsoft.com/office/drawing/2014/main" id="{821E5218-4C88-5166-A6DA-1F7DB55B276A}"/>
+                <a16:creationId xmlns:a16="http://schemas.microsoft.com/office/drawing/2014/main" id="{A449540E-E074-11F8-C56F-936DCB230F9D}"/>
               </a:ext>
             </a:extLst>
           </p:cNvPr>
@@ -7312,8 +7304,8 @@
         </p:blipFill>
         <p:spPr>
           <a:xfrm>
-            <a:off x="0" y="731074"/>
-            <a:ext cx="9144000" cy="3681351"/>
+            <a:off x="0" y="851723"/>
+            <a:ext cx="9144000" cy="3699254"/>
           </a:xfrm>
           <a:prstGeom prst="rect">
             <a:avLst/>
@@ -7406,10 +7398,10 @@
       </p:sp>
       <p:pic>
         <p:nvPicPr>
-          <p:cNvPr id="3" name="Imagen 2">
+          <p:cNvPr id="4" name="Imagen 3">
             <a:extLst>
               <a:ext uri="{FF2B5EF4-FFF2-40B4-BE49-F238E27FC236}">
-                <a16:creationId xmlns:a16="http://schemas.microsoft.com/office/drawing/2014/main" id="{CE686BAF-D854-12F5-3423-F91BED99E118}"/>
+                <a16:creationId xmlns:a16="http://schemas.microsoft.com/office/drawing/2014/main" id="{4919FA7D-DAE5-B06E-6F34-5C7355B2E019}"/>
               </a:ext>
             </a:extLst>
           </p:cNvPr>
@@ -7426,8 +7418,8 @@
         </p:blipFill>
         <p:spPr>
           <a:xfrm>
-            <a:off x="0" y="1259916"/>
-            <a:ext cx="9144000" cy="2766544"/>
+            <a:off x="0" y="1273820"/>
+            <a:ext cx="9144000" cy="2738735"/>
           </a:xfrm>
           <a:prstGeom prst="rect">
             <a:avLst/>
@@ -7520,10 +7512,10 @@
       </p:sp>
       <p:pic>
         <p:nvPicPr>
-          <p:cNvPr id="3" name="Imagen 2">
+          <p:cNvPr id="2" name="Imagen 1">
             <a:extLst>
               <a:ext uri="{FF2B5EF4-FFF2-40B4-BE49-F238E27FC236}">
-                <a16:creationId xmlns:a16="http://schemas.microsoft.com/office/drawing/2014/main" id="{380A24F4-8319-31C1-9E42-85A349DFC410}"/>
+                <a16:creationId xmlns:a16="http://schemas.microsoft.com/office/drawing/2014/main" id="{5675C3F4-ED39-D5A6-7852-0BC78C35137C}"/>
               </a:ext>
             </a:extLst>
           </p:cNvPr>
@@ -7540,7 +7532,7 @@
         </p:blipFill>
         <p:spPr>
           <a:xfrm>
-            <a:off x="1149897" y="691088"/>
+            <a:off x="1149897" y="758700"/>
             <a:ext cx="6844205" cy="3904200"/>
           </a:xfrm>
           <a:prstGeom prst="rect">
@@ -7630,10 +7622,10 @@
       </p:sp>
       <p:pic>
         <p:nvPicPr>
-          <p:cNvPr id="5" name="Imagen 4">
+          <p:cNvPr id="3" name="Imagen 2">
             <a:extLst>
               <a:ext uri="{FF2B5EF4-FFF2-40B4-BE49-F238E27FC236}">
-                <a16:creationId xmlns:a16="http://schemas.microsoft.com/office/drawing/2014/main" id="{5281314A-922B-0F02-F307-97CB60244B2B}"/>
+                <a16:creationId xmlns:a16="http://schemas.microsoft.com/office/drawing/2014/main" id="{C683098A-63FF-5A61-0CF8-71C1B57FBC1E}"/>
               </a:ext>
             </a:extLst>
           </p:cNvPr>
@@ -7650,8 +7642,8 @@
         </p:blipFill>
         <p:spPr>
           <a:xfrm>
-            <a:off x="618573" y="809369"/>
-            <a:ext cx="7906853" cy="3667637"/>
+            <a:off x="2387299" y="1171370"/>
+            <a:ext cx="4296375" cy="2943636"/>
           </a:xfrm>
           <a:prstGeom prst="rect">
             <a:avLst/>
@@ -7744,10 +7736,10 @@
       </p:sp>
       <p:pic>
         <p:nvPicPr>
-          <p:cNvPr id="3" name="Imagen 2">
+          <p:cNvPr id="6" name="Imagen 5">
             <a:extLst>
               <a:ext uri="{FF2B5EF4-FFF2-40B4-BE49-F238E27FC236}">
-                <a16:creationId xmlns:a16="http://schemas.microsoft.com/office/drawing/2014/main" id="{1D05E68A-0792-9BE9-FEC7-2BA5102640C6}"/>
+                <a16:creationId xmlns:a16="http://schemas.microsoft.com/office/drawing/2014/main" id="{F3B4BC12-D40F-4529-8B67-2F0B4FEE2AE6}"/>
               </a:ext>
             </a:extLst>
           </p:cNvPr>
@@ -7764,8 +7756,8 @@
         </p:blipFill>
         <p:spPr>
           <a:xfrm>
-            <a:off x="0" y="804449"/>
-            <a:ext cx="9144000" cy="3677478"/>
+            <a:off x="0" y="788602"/>
+            <a:ext cx="9144000" cy="3709171"/>
           </a:xfrm>
           <a:prstGeom prst="rect">
             <a:avLst/>
@@ -7858,10 +7850,10 @@
       </p:sp>
       <p:pic>
         <p:nvPicPr>
-          <p:cNvPr id="2" name="Imagen 1">
+          <p:cNvPr id="4" name="Imagen 3">
             <a:extLst>
               <a:ext uri="{FF2B5EF4-FFF2-40B4-BE49-F238E27FC236}">
-                <a16:creationId xmlns:a16="http://schemas.microsoft.com/office/drawing/2014/main" id="{BAF664CD-04C9-3B74-FEC6-18A0031AF266}"/>
+                <a16:creationId xmlns:a16="http://schemas.microsoft.com/office/drawing/2014/main" id="{B39AF3B3-D563-B2FB-3DA2-2714880D156B}"/>
               </a:ext>
             </a:extLst>
           </p:cNvPr>
@@ -7878,7 +7870,7 @@
         </p:blipFill>
         <p:spPr>
           <a:xfrm>
-            <a:off x="1113385" y="954107"/>
+            <a:off x="1113385" y="780300"/>
             <a:ext cx="6844205" cy="3904200"/>
           </a:xfrm>
           <a:prstGeom prst="rect">
@@ -7972,10 +7964,10 @@
       </p:sp>
       <p:pic>
         <p:nvPicPr>
-          <p:cNvPr id="2" name="Imagen 1">
+          <p:cNvPr id="4" name="Imagen 3">
             <a:extLst>
               <a:ext uri="{FF2B5EF4-FFF2-40B4-BE49-F238E27FC236}">
-                <a16:creationId xmlns:a16="http://schemas.microsoft.com/office/drawing/2014/main" id="{A9386666-660F-D4AA-A4ED-21B12ADADE65}"/>
+                <a16:creationId xmlns:a16="http://schemas.microsoft.com/office/drawing/2014/main" id="{AC609EF9-FEEF-9DB7-17B3-3DD63615EF37}"/>
               </a:ext>
             </a:extLst>
           </p:cNvPr>
@@ -8090,10 +8082,10 @@
       </p:sp>
       <p:pic>
         <p:nvPicPr>
-          <p:cNvPr id="3" name="Imagen 2">
+          <p:cNvPr id="6" name="Imagen 5">
             <a:extLst>
               <a:ext uri="{FF2B5EF4-FFF2-40B4-BE49-F238E27FC236}">
-                <a16:creationId xmlns:a16="http://schemas.microsoft.com/office/drawing/2014/main" id="{6B70DBEE-2E88-528C-5443-A431F94F34D8}"/>
+                <a16:creationId xmlns:a16="http://schemas.microsoft.com/office/drawing/2014/main" id="{EE0CD1EF-70D2-189E-A362-A8B9FA225033}"/>
               </a:ext>
             </a:extLst>
           </p:cNvPr>
@@ -8110,8 +8102,8 @@
         </p:blipFill>
         <p:spPr>
           <a:xfrm>
-            <a:off x="604284" y="1071343"/>
-            <a:ext cx="7935432" cy="3143689"/>
+            <a:off x="632863" y="1404765"/>
+            <a:ext cx="7878274" cy="2476846"/>
           </a:xfrm>
           <a:prstGeom prst="rect">
             <a:avLst/>
